--- a/outdoor_seld_e2e/md/seminar/修正_すり抜けと対向_v2_2026-09-15.pptx
+++ b/outdoor_seld_e2e/md/seminar/修正_すり抜けと対向_v2_2026-09-15.pptx
@@ -3577,7 +3577,7 @@
         </p:nvSpPr>
         <p:spPr>
           <a:xfrm>
-            <a:off x="3605551" y="4086883"/>
+            <a:off x="5383551" y="2753382"/>
             <a:ext cx="203200" cy="203200"/>
           </a:xfrm>
           <a:prstGeom prst="ellipse">
@@ -3628,8 +3628,8 @@
         </p:nvSpPr>
         <p:spPr>
           <a:xfrm>
-            <a:off x="2437151" y="4052593"/>
-            <a:ext cx="1117600" cy="271780"/>
+            <a:off x="5637551" y="2719092"/>
+            <a:ext cx="762000" cy="271780"/>
           </a:xfrm>
           <a:prstGeom prst="rect">
             <a:avLst/>
@@ -3642,7 +3642,7 @@
           </a:bodyPr>
           <a:lstStyle/>
           <a:p>
-            <a:pPr algn="r"/>
+            <a:pPr algn="l"/>
             <a:r>
               <a:rPr sz="1600" b="0" dirty="0" err="1">
                 <a:solidFill>
@@ -5062,8 +5062,8 @@
         </p:nvSpPr>
         <p:spPr>
           <a:xfrm>
-            <a:off x="3691911" y="2082800"/>
-            <a:ext cx="30480" cy="2004083"/>
+            <a:off x="1422400" y="2839742"/>
+            <a:ext cx="3859551" cy="30480"/>
           </a:xfrm>
           <a:prstGeom prst="rect">
             <a:avLst/>
@@ -5105,8 +5105,8 @@
           <p:nvPr/>
         </p:nvSpPr>
         <p:spPr>
-          <a:xfrm rot="10800000">
-            <a:off x="3618251" y="3909083"/>
+          <a:xfrm rot="5400000">
+            <a:off x="5193051" y="2766082"/>
             <a:ext cx="177800" cy="177800"/>
           </a:xfrm>
           <a:prstGeom prst="triangle">
@@ -5150,8 +5150,8 @@
         </p:nvSpPr>
         <p:spPr>
           <a:xfrm>
-            <a:off x="4428511" y="2082800"/>
-            <a:ext cx="30480" cy="2283483"/>
+            <a:off x="1422400" y="3627142"/>
+            <a:ext cx="4342151" cy="30480"/>
           </a:xfrm>
           <a:prstGeom prst="rect">
             <a:avLst/>
@@ -5193,8 +5193,8 @@
           <p:nvPr/>
         </p:nvSpPr>
         <p:spPr>
-          <a:xfrm rot="10800000">
-            <a:off x="4354851" y="4366283"/>
+          <a:xfrm rot="5400000">
+            <a:off x="5675651" y="3553482"/>
             <a:ext cx="177800" cy="177800"/>
           </a:xfrm>
           <a:prstGeom prst="triangle">
@@ -5238,7 +5238,7 @@
         </p:nvSpPr>
         <p:spPr>
           <a:xfrm>
-            <a:off x="3675401" y="2124733"/>
+            <a:off x="1592600" y="2823232"/>
             <a:ext cx="63500" cy="63500"/>
           </a:xfrm>
           <a:prstGeom prst="rect">
@@ -5282,7 +5282,7 @@
         </p:nvSpPr>
         <p:spPr>
           <a:xfrm>
-            <a:off x="4412001" y="2124733"/>
+            <a:off x="1592600" y="3610632"/>
             <a:ext cx="63500" cy="63500"/>
           </a:xfrm>
           <a:prstGeom prst="rect">
@@ -5325,9 +5325,9 @@
           <p:nvPr/>
         </p:nvCxnSpPr>
         <p:spPr>
-          <a:xfrm flipV="1">
-            <a:off x="3707151" y="2156483"/>
-            <a:ext cx="736600" cy="2032000"/>
+          <a:xfrm flipH="1">
+            <a:off x="1624350" y="2854982"/>
+            <a:ext cx="3860801" cy="787400"/>
           </a:xfrm>
           <a:prstGeom prst="line">
             <a:avLst/>
@@ -5362,7 +5362,7 @@
         </p:nvSpPr>
         <p:spPr>
           <a:xfrm>
-            <a:off x="3675401" y="2480333"/>
+            <a:off x="2151401" y="2823232"/>
             <a:ext cx="63500" cy="63500"/>
           </a:xfrm>
           <a:prstGeom prst="rect">
@@ -5406,7 +5406,7 @@
         </p:nvSpPr>
         <p:spPr>
           <a:xfrm>
-            <a:off x="4412001" y="2480333"/>
+            <a:off x="2151401" y="3610632"/>
             <a:ext cx="63500" cy="63500"/>
           </a:xfrm>
           <a:prstGeom prst="rect">
@@ -5449,9 +5449,9 @@
           <p:nvPr/>
         </p:nvCxnSpPr>
         <p:spPr>
-          <a:xfrm flipV="1">
-            <a:off x="3707151" y="2512083"/>
-            <a:ext cx="736600" cy="1676400"/>
+          <a:xfrm flipH="1">
+            <a:off x="2183151" y="2854982"/>
+            <a:ext cx="3302000" cy="787400"/>
           </a:xfrm>
           <a:prstGeom prst="line">
             <a:avLst/>
@@ -5486,7 +5486,7 @@
         </p:nvSpPr>
         <p:spPr>
           <a:xfrm>
-            <a:off x="3675401" y="2835933"/>
+            <a:off x="2710201" y="2823232"/>
             <a:ext cx="63500" cy="63500"/>
           </a:xfrm>
           <a:prstGeom prst="rect">
@@ -5530,7 +5530,7 @@
         </p:nvSpPr>
         <p:spPr>
           <a:xfrm>
-            <a:off x="4412001" y="2835933"/>
+            <a:off x="2710201" y="3610632"/>
             <a:ext cx="63500" cy="63500"/>
           </a:xfrm>
           <a:prstGeom prst="rect">
@@ -5573,9 +5573,9 @@
           <p:nvPr/>
         </p:nvCxnSpPr>
         <p:spPr>
-          <a:xfrm flipV="1">
-            <a:off x="3707151" y="2867683"/>
-            <a:ext cx="736600" cy="1320800"/>
+          <a:xfrm flipH="1">
+            <a:off x="2741951" y="2854982"/>
+            <a:ext cx="2743200" cy="787400"/>
           </a:xfrm>
           <a:prstGeom prst="line">
             <a:avLst/>
@@ -5610,7 +5610,7 @@
         </p:nvSpPr>
         <p:spPr>
           <a:xfrm>
-            <a:off x="3675401" y="3191533"/>
+            <a:off x="3269001" y="2823232"/>
             <a:ext cx="63500" cy="63500"/>
           </a:xfrm>
           <a:prstGeom prst="rect">
@@ -5654,7 +5654,7 @@
         </p:nvSpPr>
         <p:spPr>
           <a:xfrm>
-            <a:off x="4412001" y="3191533"/>
+            <a:off x="3269001" y="3610632"/>
             <a:ext cx="63500" cy="63500"/>
           </a:xfrm>
           <a:prstGeom prst="rect">
@@ -5697,9 +5697,9 @@
           <p:nvPr/>
         </p:nvCxnSpPr>
         <p:spPr>
-          <a:xfrm flipV="1">
-            <a:off x="3707151" y="3223283"/>
-            <a:ext cx="736600" cy="965200"/>
+          <a:xfrm flipH="1">
+            <a:off x="3300751" y="2854982"/>
+            <a:ext cx="2184400" cy="787400"/>
           </a:xfrm>
           <a:prstGeom prst="line">
             <a:avLst/>
@@ -5734,7 +5734,7 @@
         </p:nvSpPr>
         <p:spPr>
           <a:xfrm>
-            <a:off x="3675401" y="3547133"/>
+            <a:off x="3827801" y="2823232"/>
             <a:ext cx="63500" cy="63500"/>
           </a:xfrm>
           <a:prstGeom prst="rect">
@@ -5778,7 +5778,7 @@
         </p:nvSpPr>
         <p:spPr>
           <a:xfrm>
-            <a:off x="4412001" y="3547133"/>
+            <a:off x="3827801" y="3610632"/>
             <a:ext cx="63500" cy="63500"/>
           </a:xfrm>
           <a:prstGeom prst="rect">
@@ -5821,9 +5821,9 @@
           <p:nvPr/>
         </p:nvCxnSpPr>
         <p:spPr>
-          <a:xfrm flipV="1">
-            <a:off x="3707151" y="3578883"/>
-            <a:ext cx="736600" cy="609600"/>
+          <a:xfrm flipH="1">
+            <a:off x="3859551" y="2854982"/>
+            <a:ext cx="1625600" cy="787400"/>
           </a:xfrm>
           <a:prstGeom prst="line">
             <a:avLst/>
@@ -5858,7 +5858,7 @@
         </p:nvSpPr>
         <p:spPr>
           <a:xfrm>
-            <a:off x="3675401" y="3902733"/>
+            <a:off x="4386601" y="2823232"/>
             <a:ext cx="63500" cy="63500"/>
           </a:xfrm>
           <a:prstGeom prst="rect">
@@ -5902,7 +5902,7 @@
         </p:nvSpPr>
         <p:spPr>
           <a:xfrm>
-            <a:off x="4412001" y="3902733"/>
+            <a:off x="4386601" y="3610632"/>
             <a:ext cx="63500" cy="63500"/>
           </a:xfrm>
           <a:prstGeom prst="rect">
@@ -5945,9 +5945,9 @@
           <p:nvPr/>
         </p:nvCxnSpPr>
         <p:spPr>
-          <a:xfrm flipV="1">
-            <a:off x="3707151" y="3934483"/>
-            <a:ext cx="736600" cy="254000"/>
+          <a:xfrm flipH="1">
+            <a:off x="4418351" y="2854982"/>
+            <a:ext cx="1066800" cy="787400"/>
           </a:xfrm>
           <a:prstGeom prst="line">
             <a:avLst/>
@@ -5976,14 +5976,138 @@
       </p:cxnSp>
       <p:sp>
         <p:nvSpPr>
-          <p:cNvPr id="95" name="TextBox 94"/>
+          <p:cNvPr id="95" name="Rectangle 94"/>
+          <p:cNvSpPr/>
+          <p:nvPr/>
+        </p:nvSpPr>
+        <p:spPr>
+          <a:xfrm>
+            <a:off x="4945401" y="2823232"/>
+            <a:ext cx="63500" cy="63500"/>
+          </a:xfrm>
+          <a:prstGeom prst="rect">
+            <a:avLst/>
+          </a:prstGeom>
+          <a:solidFill>
+            <a:srgbClr val="C0392B"/>
+          </a:solidFill>
+          <a:ln>
+            <a:noFill/>
+          </a:ln>
+          <a:effectLst/>
+        </p:spPr>
+        <p:style>
+          <a:lnRef idx="1">
+            <a:schemeClr val="accent1"/>
+          </a:lnRef>
+          <a:fillRef idx="3">
+            <a:schemeClr val="accent1"/>
+          </a:fillRef>
+          <a:effectRef idx="2">
+            <a:schemeClr val="accent1"/>
+          </a:effectRef>
+          <a:fontRef idx="minor">
+            <a:schemeClr val="lt1"/>
+          </a:fontRef>
+        </p:style>
+        <p:txBody>
+          <a:bodyPr rtlCol="0" anchor="ctr"/>
+          <a:lstStyle/>
+          <a:p>
+            <a:pPr algn="ctr"/>
+          </a:p>
+        </p:txBody>
+      </p:sp>
+      <p:sp>
+        <p:nvSpPr>
+          <p:cNvPr id="96" name="Rectangle 95"/>
+          <p:cNvSpPr/>
+          <p:nvPr/>
+        </p:nvSpPr>
+        <p:spPr>
+          <a:xfrm>
+            <a:off x="4945401" y="3610632"/>
+            <a:ext cx="63500" cy="63500"/>
+          </a:xfrm>
+          <a:prstGeom prst="rect">
+            <a:avLst/>
+          </a:prstGeom>
+          <a:solidFill>
+            <a:srgbClr val="2E7D5B"/>
+          </a:solidFill>
+          <a:ln>
+            <a:noFill/>
+          </a:ln>
+          <a:effectLst/>
+        </p:spPr>
+        <p:style>
+          <a:lnRef idx="1">
+            <a:schemeClr val="accent1"/>
+          </a:lnRef>
+          <a:fillRef idx="3">
+            <a:schemeClr val="accent1"/>
+          </a:fillRef>
+          <a:effectRef idx="2">
+            <a:schemeClr val="accent1"/>
+          </a:effectRef>
+          <a:fontRef idx="minor">
+            <a:schemeClr val="lt1"/>
+          </a:fontRef>
+        </p:style>
+        <p:txBody>
+          <a:bodyPr rtlCol="0" anchor="ctr"/>
+          <a:lstStyle/>
+          <a:p>
+            <a:pPr algn="ctr"/>
+          </a:p>
+        </p:txBody>
+      </p:sp>
+      <p:cxnSp>
+        <p:nvCxnSpPr>
+          <p:cNvPr id="97" name="Connector 96"/>
+          <p:cNvCxnSpPr/>
+          <p:nvPr/>
+        </p:nvCxnSpPr>
+        <p:spPr>
+          <a:xfrm flipH="1">
+            <a:off x="4977151" y="2854982"/>
+            <a:ext cx="508000" cy="787400"/>
+          </a:xfrm>
+          <a:prstGeom prst="line">
+            <a:avLst/>
+          </a:prstGeom>
+          <a:ln w="10160">
+            <a:solidFill>
+              <a:srgbClr val="2E7D5B"/>
+            </a:solidFill>
+            <a:prstDash val="dash"/>
+          </a:ln>
+        </p:spPr>
+        <p:style>
+          <a:lnRef idx="2">
+            <a:schemeClr val="accent1"/>
+          </a:lnRef>
+          <a:fillRef idx="0">
+            <a:schemeClr val="accent1"/>
+          </a:fillRef>
+          <a:effectRef idx="1">
+            <a:schemeClr val="accent1"/>
+          </a:effectRef>
+          <a:fontRef idx="minor">
+            <a:schemeClr val="tx1"/>
+          </a:fontRef>
+        </p:style>
+      </p:cxnSp>
+      <p:sp>
+        <p:nvSpPr>
+          <p:cNvPr id="98" name="TextBox 97"/>
           <p:cNvSpPr txBox="1"/>
           <p:nvPr/>
         </p:nvSpPr>
         <p:spPr>
           <a:xfrm>
-            <a:off x="1827550" y="2082800"/>
-            <a:ext cx="1778000" cy="431800"/>
+            <a:off x="1473200" y="2346982"/>
+            <a:ext cx="1905000" cy="431800"/>
           </a:xfrm>
           <a:prstGeom prst="rect">
             <a:avLst/>
@@ -5996,7 +6120,7 @@
           </a:bodyPr>
           <a:lstStyle/>
           <a:p>
-            <a:pPr algn="r">
+            <a:pPr algn="l">
               <a:lnSpc>
                 <a:spcPct val="125000"/>
               </a:lnSpc>
@@ -6013,7 +6137,7 @@
             </a:r>
           </a:p>
           <a:p>
-            <a:pPr algn="r">
+            <a:pPr algn="l">
               <a:lnSpc>
                 <a:spcPct val="125000"/>
               </a:lnSpc>
@@ -6033,14 +6157,14 @@
       </p:sp>
       <p:sp>
         <p:nvSpPr>
-          <p:cNvPr id="96" name="TextBox 95"/>
+          <p:cNvPr id="99" name="TextBox 98"/>
           <p:cNvSpPr txBox="1"/>
           <p:nvPr/>
         </p:nvSpPr>
         <p:spPr>
           <a:xfrm>
-            <a:off x="4570751" y="2082800"/>
-            <a:ext cx="1778000" cy="431800"/>
+            <a:off x="1473200" y="3743982"/>
+            <a:ext cx="1905000" cy="431800"/>
           </a:xfrm>
           <a:prstGeom prst="rect">
             <a:avLst/>
@@ -6090,14 +6214,14 @@
       </p:sp>
       <p:sp>
         <p:nvSpPr>
-          <p:cNvPr id="97" name="TextBox 96"/>
+          <p:cNvPr id="100" name="TextBox 99"/>
           <p:cNvSpPr txBox="1"/>
           <p:nvPr/>
         </p:nvSpPr>
         <p:spPr>
           <a:xfrm>
-            <a:off x="4570751" y="2590800"/>
-            <a:ext cx="1778000" cy="381000"/>
+            <a:off x="2032000" y="2931182"/>
+            <a:ext cx="1905000" cy="381000"/>
           </a:xfrm>
           <a:prstGeom prst="rect">
             <a:avLst/>
@@ -6147,14 +6271,14 @@
       </p:sp>
       <p:sp>
         <p:nvSpPr>
-          <p:cNvPr id="98" name="TextBox 97"/>
+          <p:cNvPr id="101" name="TextBox 100"/>
           <p:cNvSpPr txBox="1"/>
           <p:nvPr/>
         </p:nvSpPr>
         <p:spPr>
           <a:xfrm>
-            <a:off x="1179851" y="3807483"/>
-            <a:ext cx="1905000" cy="203200"/>
+            <a:off x="1179851" y="4318005"/>
+            <a:ext cx="2159000" cy="203200"/>
           </a:xfrm>
           <a:prstGeom prst="rect">
             <a:avLst/>
